--- a/slides/decks/s15-aml-all.pptx
+++ b/slides/decks/s15-aml-all.pptx
@@ -135,13 +135,13 @@
   <p:extLst>
     <p:ext uri="{521415D9-36F7-43E2-AB2F-B90AF26B5E84}">
       <p14:sectionLst xmlns:p14="http://schemas.microsoft.com/office/powerpoint/2010/main">
-        <p14:section name="Opening" id="{a8836f56-4f06-4479-280a-add776e7cb99}">
+        <p14:section name="Opening" id="{cd6f657d-b70c-188d-6752-ac9630428e39}">
           <p14:sldIdLst>
             <p14:sldId id="256"/>
             <p14:sldId id="257"/>
           </p14:sldIdLst>
         </p14:section>
-        <p14:section name="AML in CR1" id="{5498629e-aeb8-420a-f7ac-de528976c07e}">
+        <p14:section name="AML in CR1" id="{c596aed1-5488-76cd-7e41-c9419abbb1ac}">
           <p14:sldIdLst>
             <p14:sldId id="258"/>
             <p14:sldId id="259"/>
@@ -149,7 +149,7 @@
             <p14:sldId id="261"/>
           </p14:sldIdLst>
         </p14:section>
-        <p14:section name="Advanced AML and APL" id="{b66b250f-53e6-3568-fa9b-bb30d163312c}">
+        <p14:section name="Advanced AML and APL" id="{89215af7-735d-c380-dc2b-2270d0aa0504}">
           <p14:sldIdLst>
             <p14:sldId id="262"/>
             <p14:sldId id="263"/>
@@ -157,7 +157,7 @@
             <p14:sldId id="265"/>
           </p14:sldIdLst>
         </p14:section>
-        <p14:section name="ALL in adults" id="{2083248b-65d5-5c1f-9164-f3af4934895d}">
+        <p14:section name="ALL in adults" id="{c4536768-e03d-3ae4-5d66-29d7128ba0cb}">
           <p14:sldIdLst>
             <p14:sldId id="266"/>
             <p14:sldId id="267"/>
@@ -167,7 +167,7 @@
             <p14:sldId id="271"/>
           </p14:sldIdLst>
         </p14:section>
-        <p14:section name="Board questions" id="{1eb755f0-51fc-2db4-7c5e-9c7e6d98849d}">
+        <p14:section name="Board questions" id="{2f945391-998d-bb9a-cd2d-27579badcdeb}">
           <p14:sldIdLst>
             <p14:sldId id="272"/>
             <p14:sldId id="273"/>
@@ -177,7 +177,7 @@
             <p14:sldId id="277"/>
           </p14:sldIdLst>
         </p14:section>
-        <p14:section name="References" id="{ac390d53-2524-c9e4-20de-11ad6dee57dd}">
+        <p14:section name="References" id="{4c62eada-d271-5b9f-706a-18ccdfc124ab}">
           <p14:sldIdLst>
             <p14:sldId id="278"/>
             <p14:sldId id="279"/>
@@ -185,7 +185,7 @@
             <p14:sldId id="281"/>
           </p14:sldIdLst>
         </p14:section>
-        <p14:section name="Backup" id="{5bb6ff68-0ab5-ef8d-4e25-820538e1635b}">
+        <p14:section name="Backup" id="{090ae365-e70c-c5cd-d43a-07c38931e7e9}">
           <p14:sldIdLst>
             <p14:sldId id="282"/>
             <p14:sldId id="283"/>
@@ -3416,6 +3416,28 @@
             <a:r>
               <a:rPr lang="en-US" dirty="0"/>
               <a:t>考試常見的陷阱在 FLT3-ITD 和 TP53。舊版 FLT3-ITD 要看 allelic ratio，2022 版拿掉了，NPM1 合併 FLT3-ITD 現在直接歸 intermediate。TP53 加了 10% 的 VAF 門檻，低於這個值不算 adverse。CEBPA 以前要求 biallelic，現在只看是不是 bZIP in-frame。這些改變讓 adverse 組變大，需要在 CR1 討論移植的病人也跟著變多。</a:t>
+            </a:r>
+          </a:p>
+          <a:p>
+            <a:pPr>
+              <a:spcAft>
+                <a:spcPts val="600"/>
+              </a:spcAft>
+            </a:pPr>
+            <a:r>
+              <a:rPr lang="en-US" b="1" dirty="0"/>
+              <a:t>講者提醒（不念出來）：</a:t>
+            </a:r>
+          </a:p>
+          <a:p>
+            <a:pPr>
+              <a:spcAft>
+                <a:spcPts val="600"/>
+              </a:spcAft>
+            </a:pPr>
+            <a:r>
+              <a:rPr lang="en-US" dirty="0"/>
+              <a:t>- Reference 5 (Dohner 2022) is copied verbatim from the Ch. 70 reference list, which gives Blood 2022;129(4):424–47; that volume and page range look wrong for the ELN 2022 paper. Check before circulating the reference list.</a:t>
             </a:r>
           </a:p>
         </p:txBody>
@@ -7353,7 +7375,7 @@
                   <a:schemeClr val="tx1"/>
                 </a:solidFill>
               </a:rPr>
-              <a:t>Section 72.5 (Giebel 2019). MRD rising above 10⁻³ after initial response: very high relapse risk (Brüggemann 2010).</a:t>
+              <a:t>Giebel 2019. MRD rising above 10⁻³ after response: very high relapse risk (Brüggemann 2010).</a:t>
             </a:r>
             <a:endParaRPr lang="en-US" sz="1600" dirty="0"/>
           </a:p>
@@ -7795,7 +7817,7 @@
                   <a:schemeClr val="tx1"/>
                 </a:solidFill>
               </a:rPr>
-              <a:t>Maintenance 6-MP + MTX for ≥ 2 years</a:t>
+              <a:t>Maintenance ≥ 2 years</a:t>
             </a:r>
             <a:endParaRPr lang="en-US" sz="1500" dirty="0"/>
           </a:p>
@@ -8348,8 +8370,8 @@
             <a:tbl>
               <a:tblPr/>
               <a:tblGrid>
-                <a:gridCol w="3118104"/>
-                <a:gridCol w="3575304"/>
+                <a:gridCol w="2935224"/>
+                <a:gridCol w="3758184"/>
                 <a:gridCol w="4123944"/>
               </a:tblGrid>
               <a:tr h="0">
@@ -8709,7 +8731,21 @@
                             <a:schemeClr val="tx1"/>
                           </a:solidFill>
                         </a:rPr>
-                        <a:t>VOD risk: &gt; 2 courses, liver disease, 2 alkylators</a:t>
+                        <a:t>VOD risk: &gt; 2 courses,</a:t>
+                      </a:r>
+                      <a:endParaRPr lang="en-US" sz="1600" dirty="0"/>
+                    </a:p>
+                    <a:p>
+                      <a:pPr indent="0" marL="0">
+                        <a:buNone/>
+                      </a:pPr>
+                      <a:r>
+                        <a:rPr lang="en-US" sz="1600" dirty="0">
+                          <a:solidFill>
+                            <a:schemeClr val="tx1"/>
+                          </a:solidFill>
+                        </a:rPr>
+                        <a:t>liver disease, double alkylators</a:t>
                       </a:r>
                       <a:endParaRPr lang="en-US" sz="1600" dirty="0"/>
                     </a:p>
@@ -9236,7 +9272,7 @@
         </p:nvSpPr>
         <p:spPr>
           <a:xfrm>
-            <a:off x="685800" y="5074920"/>
+            <a:off x="685800" y="5120640"/>
             <a:ext cx="10817352" cy="411480"/>
           </a:xfrm>
           <a:prstGeom prst="rect">
@@ -9258,7 +9294,7 @@
                   <a:schemeClr val="tx1"/>
                 </a:solidFill>
               </a:rPr>
-              <a:t>After inotuzumab, schedule allo-HCT within 6–8 weeks of starting salvage. 5–10% are refractory; 30–50% relapse after CR.</a:t>
+              <a:t>After inotuzumab: allo-HCT within 6–8 weeks of starting salvage. Refractory 5–10%; relapse after CR 30–50%.</a:t>
             </a:r>
             <a:endParaRPr lang="en-US" sz="1600" dirty="0"/>
           </a:p>
@@ -19651,7 +19687,7 @@
                             <a:schemeClr val="tx1"/>
                           </a:solidFill>
                         </a:rPr>
-                        <a:t>Chemotherapy or auto-HCT</a:t>
+                        <a:t>Chemo or auto-HCT</a:t>
                       </a:r>
                       <a:endParaRPr lang="en-US" sz="1700" dirty="0"/>
                     </a:p>
@@ -19935,7 +19971,7 @@
                             <a:schemeClr val="tx1"/>
                           </a:solidFill>
                         </a:rPr>
-                        <a:t>t(6;9); KMT2A-r; BCR::ABL1; inv(3); −5, −7, 17p; complex; TP53</a:t>
+                        <a:t>t(6;9); KMT2A-r; BCR::ABL1; inv(3); −5/−7/17p; complex; TP53</a:t>
                       </a:r>
                       <a:endParaRPr lang="en-US" sz="1700" dirty="0"/>
                     </a:p>
@@ -20015,7 +20051,7 @@
                             <a:schemeClr val="tx1"/>
                           </a:solidFill>
                         </a:rPr>
-                        <a:t>Allo-HCT as soon as CR is reached</a:t>
+                        <a:t>Allo-HCT as soon as in CR</a:t>
                       </a:r>
                       <a:endParaRPr lang="en-US" sz="1700" dirty="0"/>
                     </a:p>
@@ -20605,7 +20641,7 @@
                             <a:schemeClr val="tx1"/>
                           </a:solidFill>
                         </a:rPr>
-                        <a:t>Only in-frame bZIP mutations are favorable, mono- or bi-allelic</a:t>
+                        <a:t>Only in-frame bZIP mutations favorable, mono- or bi-allelic</a:t>
                       </a:r>
                       <a:endParaRPr lang="en-US" sz="1700" dirty="0"/>
                     </a:p>
@@ -22365,7 +22401,7 @@
                             <a:schemeClr val="tx1"/>
                           </a:solidFill>
                         </a:rPr>
-                        <a:t>No CR after 2 intensive courses, ≥ 1 with intermediate-dose Ara-C</a:t>
+                        <a:t>No CR after 2 intensive courses, ≥ 1 with ID cytarabine</a:t>
                       </a:r>
                       <a:endParaRPr lang="en-US" sz="1700" dirty="0"/>
                     </a:p>
@@ -22939,7 +22975,7 @@
                             <a:schemeClr val="tx1"/>
                           </a:solidFill>
                         </a:rPr>
-                        <a:t>Immediate sequential conditioning: LFS similar to induction first</a:t>
+                        <a:t>Sequential conditioning + immediate HCT: LFS like induction</a:t>
                       </a:r>
                       <a:endParaRPr lang="en-US" sz="1700" dirty="0"/>
                     </a:p>

--- a/slides/decks/s15-aml-all.pptx
+++ b/slides/decks/s15-aml-all.pptx
@@ -135,13 +135,13 @@
   <p:extLst>
     <p:ext uri="{521415D9-36F7-43E2-AB2F-B90AF26B5E84}">
       <p14:sectionLst xmlns:p14="http://schemas.microsoft.com/office/powerpoint/2010/main">
-        <p14:section name="Opening" id="{cd6f657d-b70c-188d-6752-ac9630428e39}">
+        <p14:section name="Opening" id="{b3e743fe-efa3-ac46-e4cf-23a4b8c85b57}">
           <p14:sldIdLst>
             <p14:sldId id="256"/>
             <p14:sldId id="257"/>
           </p14:sldIdLst>
         </p14:section>
-        <p14:section name="AML in CR1" id="{c596aed1-5488-76cd-7e41-c9419abbb1ac}">
+        <p14:section name="AML in CR1" id="{16772499-04da-b51f-e900-d76a875cba96}">
           <p14:sldIdLst>
             <p14:sldId id="258"/>
             <p14:sldId id="259"/>
@@ -149,7 +149,7 @@
             <p14:sldId id="261"/>
           </p14:sldIdLst>
         </p14:section>
-        <p14:section name="Advanced AML and APL" id="{89215af7-735d-c380-dc2b-2270d0aa0504}">
+        <p14:section name="Advanced AML and APL" id="{196864bd-b8a0-18e2-ca55-f3be4289f8fc}">
           <p14:sldIdLst>
             <p14:sldId id="262"/>
             <p14:sldId id="263"/>
@@ -157,7 +157,7 @@
             <p14:sldId id="265"/>
           </p14:sldIdLst>
         </p14:section>
-        <p14:section name="ALL in adults" id="{c4536768-e03d-3ae4-5d66-29d7128ba0cb}">
+        <p14:section name="ALL in adults" id="{c25dac75-f851-6816-fe5d-7e0c8b60bcfa}">
           <p14:sldIdLst>
             <p14:sldId id="266"/>
             <p14:sldId id="267"/>
@@ -167,7 +167,7 @@
             <p14:sldId id="271"/>
           </p14:sldIdLst>
         </p14:section>
-        <p14:section name="Board questions" id="{2f945391-998d-bb9a-cd2d-27579badcdeb}">
+        <p14:section name="Board questions" id="{14fcce90-f7be-7c35-0705-a67e96cf883a}">
           <p14:sldIdLst>
             <p14:sldId id="272"/>
             <p14:sldId id="273"/>
@@ -177,7 +177,7 @@
             <p14:sldId id="277"/>
           </p14:sldIdLst>
         </p14:section>
-        <p14:section name="References" id="{4c62eada-d271-5b9f-706a-18ccdfc124ab}">
+        <p14:section name="References" id="{9c07235f-e174-098d-1b65-fcd3bc25c6b8}">
           <p14:sldIdLst>
             <p14:sldId id="278"/>
             <p14:sldId id="279"/>
@@ -185,7 +185,7 @@
             <p14:sldId id="281"/>
           </p14:sldIdLst>
         </p14:section>
-        <p14:section name="Backup" id="{090ae365-e70c-c5cd-d43a-07c38931e7e9}">
+        <p14:section name="Backup" id="{7eee382d-55b5-18f6-e290-88f672dd3a1d}">
           <p14:sldIdLst>
             <p14:sldId id="282"/>
             <p14:sldId id="283"/>
